--- a/output/part7_metrics.pptx
+++ b/output/part7_metrics.pptx
@@ -2258,7 +2258,7 @@
         <p:spPr>
           <a:xfrm>
             <a:off x="4572000" y="530352"/>
-            <a:ext cx="0" cy="3310128"/>
+            <a:ext cx="9144" cy="3310128"/>
           </a:xfrm>
           <a:prstGeom prst="line">
             <a:avLst/>
@@ -8988,7 +8988,7 @@
         <p:spPr>
           <a:xfrm>
             <a:off x="1691640" y="1124712"/>
-            <a:ext cx="457200" cy="0"/>
+            <a:ext cx="457200" cy="9144"/>
           </a:xfrm>
           <a:prstGeom prst="line">
             <a:avLst/>
@@ -9199,7 +9199,7 @@
         <p:spPr>
           <a:xfrm>
             <a:off x="3017520" y="1554480"/>
-            <a:ext cx="0" cy="411480"/>
+            <a:ext cx="9144" cy="411480"/>
           </a:xfrm>
           <a:prstGeom prst="line">
             <a:avLst/>
@@ -9579,8 +9579,8 @@
         </p:nvSpPr>
         <p:spPr>
           <a:xfrm>
-            <a:off x="3017520" y="1984248"/>
-            <a:ext cx="-594360" cy="320040"/>
+            <a:off x="2423160" y="1984248"/>
+            <a:ext cx="594360" cy="320040"/>
           </a:xfrm>
           <a:prstGeom prst="line">
             <a:avLst/>
@@ -10929,7 +10929,7 @@
         <p:spPr>
           <a:xfrm>
             <a:off x="1737360" y="1371600"/>
-            <a:ext cx="457200" cy="0"/>
+            <a:ext cx="457200" cy="9144"/>
           </a:xfrm>
           <a:prstGeom prst="line">
             <a:avLst/>
@@ -11157,7 +11157,7 @@
         <p:spPr>
           <a:xfrm>
             <a:off x="3840480" y="1371600"/>
-            <a:ext cx="457200" cy="0"/>
+            <a:ext cx="457200" cy="9144"/>
           </a:xfrm>
           <a:prstGeom prst="line">
             <a:avLst/>
@@ -11385,7 +11385,7 @@
         <p:spPr>
           <a:xfrm>
             <a:off x="5943600" y="1371600"/>
-            <a:ext cx="457200" cy="0"/>
+            <a:ext cx="457200" cy="9144"/>
           </a:xfrm>
           <a:prstGeom prst="line">
             <a:avLst/>
@@ -11613,7 +11613,7 @@
         <p:spPr>
           <a:xfrm>
             <a:off x="7863840" y="1371600"/>
-            <a:ext cx="457200" cy="0"/>
+            <a:ext cx="457200" cy="9144"/>
           </a:xfrm>
           <a:prstGeom prst="line">
             <a:avLst/>
@@ -14211,7 +14211,7 @@
         <p:spPr>
           <a:xfrm>
             <a:off x="4572000" y="530352"/>
-            <a:ext cx="0" cy="3931920"/>
+            <a:ext cx="9144" cy="3931920"/>
           </a:xfrm>
           <a:prstGeom prst="line">
             <a:avLst/>
@@ -17845,7 +17845,7 @@
         <p:spPr>
           <a:xfrm>
             <a:off x="502920" y="2304288"/>
-            <a:ext cx="320040" cy="0"/>
+            <a:ext cx="320040" cy="9144"/>
           </a:xfrm>
           <a:prstGeom prst="line">
             <a:avLst/>
@@ -17868,7 +17868,7 @@
         <p:spPr>
           <a:xfrm>
             <a:off x="822960" y="2304288"/>
-            <a:ext cx="0" cy="-155448"/>
+            <a:ext cx="9144" cy="155448"/>
           </a:xfrm>
           <a:prstGeom prst="line">
             <a:avLst/>
@@ -17891,7 +17891,7 @@
         <p:spPr>
           <a:xfrm>
             <a:off x="822960" y="2148840"/>
-            <a:ext cx="320040" cy="0"/>
+            <a:ext cx="320040" cy="9144"/>
           </a:xfrm>
           <a:prstGeom prst="line">
             <a:avLst/>
@@ -17914,7 +17914,7 @@
         <p:spPr>
           <a:xfrm>
             <a:off x="1143000" y="2148840"/>
-            <a:ext cx="0" cy="-155448"/>
+            <a:ext cx="9144" cy="155448"/>
           </a:xfrm>
           <a:prstGeom prst="line">
             <a:avLst/>
@@ -17937,7 +17937,7 @@
         <p:spPr>
           <a:xfrm>
             <a:off x="1143000" y="1993392"/>
-            <a:ext cx="320040" cy="0"/>
+            <a:ext cx="320040" cy="9144"/>
           </a:xfrm>
           <a:prstGeom prst="line">
             <a:avLst/>
@@ -17960,7 +17960,7 @@
         <p:spPr>
           <a:xfrm>
             <a:off x="1463040" y="1993392"/>
-            <a:ext cx="0" cy="-146304"/>
+            <a:ext cx="9144" cy="146304"/>
           </a:xfrm>
           <a:prstGeom prst="line">
             <a:avLst/>
@@ -17983,7 +17983,7 @@
         <p:spPr>
           <a:xfrm>
             <a:off x="1463040" y="1847088"/>
-            <a:ext cx="320040" cy="0"/>
+            <a:ext cx="320040" cy="9144"/>
           </a:xfrm>
           <a:prstGeom prst="line">
             <a:avLst/>
@@ -18006,7 +18006,7 @@
         <p:spPr>
           <a:xfrm>
             <a:off x="1783080" y="1847088"/>
-            <a:ext cx="0" cy="-128016"/>
+            <a:ext cx="9144" cy="128016"/>
           </a:xfrm>
           <a:prstGeom prst="line">
             <a:avLst/>
@@ -18238,8 +18238,8 @@
         </p:nvSpPr>
         <p:spPr>
           <a:xfrm>
-            <a:off x="4937760" y="2176272"/>
-            <a:ext cx="228600" cy="-146304"/>
+            <a:off x="4937760" y="2029968"/>
+            <a:ext cx="228600" cy="146304"/>
           </a:xfrm>
           <a:prstGeom prst="line">
             <a:avLst/>
@@ -18284,8 +18284,8 @@
         </p:nvSpPr>
         <p:spPr>
           <a:xfrm>
-            <a:off x="5394960" y="2267712"/>
-            <a:ext cx="228600" cy="-274320"/>
+            <a:off x="5394960" y="1993392"/>
+            <a:ext cx="228600" cy="274320"/>
           </a:xfrm>
           <a:prstGeom prst="line">
             <a:avLst/>
@@ -18330,8 +18330,8 @@
         </p:nvSpPr>
         <p:spPr>
           <a:xfrm>
-            <a:off x="5852160" y="2212848"/>
-            <a:ext cx="228600" cy="-155448"/>
+            <a:off x="5852160" y="2057400"/>
+            <a:ext cx="228600" cy="155448"/>
           </a:xfrm>
           <a:prstGeom prst="line">
             <a:avLst/>
@@ -18981,7 +18981,7 @@
         <p:spPr>
           <a:xfrm>
             <a:off x="4572000" y="530352"/>
-            <a:ext cx="0" cy="4434840"/>
+            <a:ext cx="9144" cy="4434840"/>
           </a:xfrm>
           <a:prstGeom prst="line">
             <a:avLst/>
@@ -19400,7 +19400,7 @@
         <p:spPr>
           <a:xfrm>
             <a:off x="868680" y="1417320"/>
-            <a:ext cx="0" cy="347472"/>
+            <a:ext cx="9144" cy="347472"/>
           </a:xfrm>
           <a:prstGeom prst="line">
             <a:avLst/>
@@ -19424,7 +19424,7 @@
         <p:spPr>
           <a:xfrm>
             <a:off x="1920240" y="1417320"/>
-            <a:ext cx="0" cy="347472"/>
+            <a:ext cx="9144" cy="347472"/>
           </a:xfrm>
           <a:prstGeom prst="line">
             <a:avLst/>
@@ -19448,7 +19448,7 @@
         <p:spPr>
           <a:xfrm>
             <a:off x="2971800" y="1417320"/>
-            <a:ext cx="0" cy="347472"/>
+            <a:ext cx="9144" cy="347472"/>
           </a:xfrm>
           <a:prstGeom prst="line">
             <a:avLst/>
@@ -20229,7 +20229,7 @@
         <p:spPr>
           <a:xfrm>
             <a:off x="5349240" y="1417320"/>
-            <a:ext cx="0" cy="384048"/>
+            <a:ext cx="9144" cy="384048"/>
           </a:xfrm>
           <a:prstGeom prst="line">
             <a:avLst/>
@@ -20253,7 +20253,7 @@
         <p:spPr>
           <a:xfrm>
             <a:off x="6309360" y="1417320"/>
-            <a:ext cx="0" cy="384048"/>
+            <a:ext cx="9144" cy="384048"/>
           </a:xfrm>
           <a:prstGeom prst="line">
             <a:avLst/>
@@ -20277,7 +20277,7 @@
         <p:spPr>
           <a:xfrm>
             <a:off x="7269480" y="1417320"/>
-            <a:ext cx="0" cy="384048"/>
+            <a:ext cx="9144" cy="384048"/>
           </a:xfrm>
           <a:prstGeom prst="line">
             <a:avLst/>
@@ -21194,7 +21194,7 @@
         <p:spPr>
           <a:xfrm>
             <a:off x="1828800" y="1463040"/>
-            <a:ext cx="731520" cy="0"/>
+            <a:ext cx="731520" cy="9144"/>
           </a:xfrm>
           <a:prstGeom prst="line">
             <a:avLst/>
@@ -21456,7 +21456,7 @@
         <p:spPr>
           <a:xfrm>
             <a:off x="4754880" y="1463040"/>
-            <a:ext cx="640080" cy="0"/>
+            <a:ext cx="640080" cy="9144"/>
           </a:xfrm>
           <a:prstGeom prst="line">
             <a:avLst/>
@@ -21684,7 +21684,7 @@
         <p:spPr>
           <a:xfrm>
             <a:off x="3611880" y="2148840"/>
-            <a:ext cx="0" cy="411480"/>
+            <a:ext cx="9144" cy="411480"/>
           </a:xfrm>
           <a:prstGeom prst="line">
             <a:avLst/>
@@ -21856,7 +21856,7 @@
         <p:spPr>
           <a:xfrm>
             <a:off x="4754880" y="3044952"/>
-            <a:ext cx="640080" cy="0"/>
+            <a:ext cx="640080" cy="9144"/>
           </a:xfrm>
           <a:prstGeom prst="line">
             <a:avLst/>
@@ -23351,7 +23351,7 @@
         <p:spPr>
           <a:xfrm>
             <a:off x="2377440" y="2624328"/>
-            <a:ext cx="201168" cy="0"/>
+            <a:ext cx="201168" cy="9144"/>
           </a:xfrm>
           <a:prstGeom prst="line">
             <a:avLst/>
@@ -23413,8 +23413,8 @@
         </p:nvSpPr>
         <p:spPr>
           <a:xfrm>
-            <a:off x="1417320" y="2029968"/>
-            <a:ext cx="0" cy="-566928"/>
+            <a:off x="1417320" y="1463040"/>
+            <a:ext cx="9144" cy="566928"/>
           </a:xfrm>
           <a:prstGeom prst="line">
             <a:avLst/>
